--- a/宋佳刚 赵志国.pptx
+++ b/宋佳刚 赵志国.pptx
@@ -2314,7 +2314,7 @@
                 <a:ea typeface="微软雅黑" panose="020B0503020204020204" pitchFamily="34" charset="-122"/>
                 <a:cs typeface="微软雅黑" panose="020B0503020204020204" pitchFamily="34" charset="-120"/>
               </a:rPr>
-              <a:t>Blinn-Phong 光照 · 法线贴图 · 阴影映射 · FBO 后处理 · Blender 程序化建模</a:t>
+              <a:t>Blinn-Phong 光照 · 法线贴图 · 阴影映射 · FBO 后处理 · Blender 建模</a:t>
             </a:r>
             <a:endParaRPr lang="en-US" sz="1500" dirty="0"/>
           </a:p>
@@ -2355,7 +2355,7 @@
                 <a:ea typeface="微软雅黑" panose="020B0503020204020204" pitchFamily="34" charset="-122"/>
                 <a:cs typeface="微软雅黑" panose="020B0503020204020204" pitchFamily="34" charset="-120"/>
               </a:rPr>
-              <a:t>小组成员：宋佳刚（学号 240207132，工作占比 50%）　赵志国（学号 240207122，工作占比 50%）
+              <a:t>小组成员：宋佳刚　赵志国
 </a:t>
             </a:r>
             <a:endParaRPr lang="en-US" sz="1400" dirty="0"/>
@@ -2574,7 +2574,11 @@
         <p:nvSpPr>
           <p:cNvPr id="6" name="Shape 4"/>
           <p:cNvSpPr/>
-          <p:nvPr/>
+          <p:nvPr>
+            <p:custDataLst>
+              <p:tags r:id="rId1"/>
+            </p:custDataLst>
+          </p:nvPr>
         </p:nvSpPr>
         <p:spPr>
           <a:xfrm>
@@ -2608,7 +2612,11 @@
         <p:nvSpPr>
           <p:cNvPr id="7" name="Text 5"/>
           <p:cNvSpPr/>
-          <p:nvPr/>
+          <p:nvPr>
+            <p:custDataLst>
+              <p:tags r:id="rId2"/>
+            </p:custDataLst>
+          </p:nvPr>
         </p:nvSpPr>
         <p:spPr>
           <a:xfrm>
@@ -2646,7 +2654,11 @@
         <p:nvSpPr>
           <p:cNvPr id="8" name="Text 6"/>
           <p:cNvSpPr/>
-          <p:nvPr/>
+          <p:nvPr>
+            <p:custDataLst>
+              <p:tags r:id="rId3"/>
+            </p:custDataLst>
+          </p:nvPr>
         </p:nvSpPr>
         <p:spPr>
           <a:xfrm>
@@ -2684,7 +2696,11 @@
         <p:nvSpPr>
           <p:cNvPr id="9" name="Shape 7"/>
           <p:cNvSpPr/>
-          <p:nvPr/>
+          <p:nvPr>
+            <p:custDataLst>
+              <p:tags r:id="rId4"/>
+            </p:custDataLst>
+          </p:nvPr>
         </p:nvSpPr>
         <p:spPr>
           <a:xfrm>
@@ -2718,7 +2734,11 @@
         <p:nvSpPr>
           <p:cNvPr id="10" name="Text 8"/>
           <p:cNvSpPr/>
-          <p:nvPr/>
+          <p:nvPr>
+            <p:custDataLst>
+              <p:tags r:id="rId5"/>
+            </p:custDataLst>
+          </p:nvPr>
         </p:nvSpPr>
         <p:spPr>
           <a:xfrm>
@@ -2756,7 +2776,11 @@
         <p:nvSpPr>
           <p:cNvPr id="11" name="Text 9"/>
           <p:cNvSpPr/>
-          <p:nvPr/>
+          <p:nvPr>
+            <p:custDataLst>
+              <p:tags r:id="rId6"/>
+            </p:custDataLst>
+          </p:nvPr>
         </p:nvSpPr>
         <p:spPr>
           <a:xfrm>
@@ -2794,7 +2818,11 @@
         <p:nvSpPr>
           <p:cNvPr id="12" name="Shape 10"/>
           <p:cNvSpPr/>
-          <p:nvPr/>
+          <p:nvPr>
+            <p:custDataLst>
+              <p:tags r:id="rId7"/>
+            </p:custDataLst>
+          </p:nvPr>
         </p:nvSpPr>
         <p:spPr>
           <a:xfrm>
@@ -2828,7 +2856,11 @@
         <p:nvSpPr>
           <p:cNvPr id="13" name="Text 11"/>
           <p:cNvSpPr/>
-          <p:nvPr/>
+          <p:nvPr>
+            <p:custDataLst>
+              <p:tags r:id="rId8"/>
+            </p:custDataLst>
+          </p:nvPr>
         </p:nvSpPr>
         <p:spPr>
           <a:xfrm>
@@ -2866,7 +2898,11 @@
         <p:nvSpPr>
           <p:cNvPr id="14" name="Text 12"/>
           <p:cNvSpPr/>
-          <p:nvPr/>
+          <p:nvPr>
+            <p:custDataLst>
+              <p:tags r:id="rId9"/>
+            </p:custDataLst>
+          </p:nvPr>
         </p:nvSpPr>
         <p:spPr>
           <a:xfrm>
@@ -2904,7 +2940,11 @@
         <p:nvSpPr>
           <p:cNvPr id="15" name="Shape 13"/>
           <p:cNvSpPr/>
-          <p:nvPr/>
+          <p:nvPr>
+            <p:custDataLst>
+              <p:tags r:id="rId10"/>
+            </p:custDataLst>
+          </p:nvPr>
         </p:nvSpPr>
         <p:spPr>
           <a:xfrm>
@@ -2938,7 +2978,11 @@
         <p:nvSpPr>
           <p:cNvPr id="16" name="Text 14"/>
           <p:cNvSpPr/>
-          <p:nvPr/>
+          <p:nvPr>
+            <p:custDataLst>
+              <p:tags r:id="rId11"/>
+            </p:custDataLst>
+          </p:nvPr>
         </p:nvSpPr>
         <p:spPr>
           <a:xfrm>
@@ -2976,7 +3020,11 @@
         <p:nvSpPr>
           <p:cNvPr id="17" name="Text 15"/>
           <p:cNvSpPr/>
-          <p:nvPr/>
+          <p:nvPr>
+            <p:custDataLst>
+              <p:tags r:id="rId12"/>
+            </p:custDataLst>
+          </p:nvPr>
         </p:nvSpPr>
         <p:spPr>
           <a:xfrm>
@@ -5079,10 +5127,36 @@
                         </a:rPr>
                         <a:t>光照与着色（Blinn-Phong / 法线贴图）、后处理</a:t>
                       </a:r>
-                      <a:endParaRPr lang="en-US" sz="1400" dirty="0">
+                      <a:r>
+                        <a:rPr lang="zh-CN" altLang="en-US" sz="1400" dirty="0">
+                          <a:solidFill>
+                            <a:srgbClr val="000000"/>
+                          </a:solidFill>
+                          <a:latin typeface="微软雅黑" panose="020B0503020204020204" pitchFamily="34" charset="-122"/>
+                          <a:ea typeface="微软雅黑" panose="020B0503020204020204" pitchFamily="34" charset="-122"/>
+                          <a:cs typeface="微软雅黑" panose="020B0503020204020204" pitchFamily="34" charset="-120"/>
+                        </a:rPr>
+                        <a:t>、</a:t>
+                      </a:r>
+                      <a:r>
+                        <a:rPr lang="en-US" sz="1400" dirty="0">
+                          <a:solidFill>
+                            <a:srgbClr val="000000"/>
+                          </a:solidFill>
+                          <a:latin typeface="微软雅黑" panose="020B0503020204020204" pitchFamily="34" charset="-122"/>
+                          <a:ea typeface="微软雅黑" panose="020B0503020204020204" pitchFamily="34" charset="-122"/>
+                          <a:cs typeface="微软雅黑" panose="020B0503020204020204" pitchFamily="34" charset="-120"/>
+                          <a:sym typeface="+mn-ea"/>
+                        </a:rPr>
+                        <a:t>交互</a:t>
+                      </a:r>
+                      <a:endParaRPr lang="zh-CN" altLang="en-US" sz="1400" dirty="0">
+                        <a:solidFill>
+                          <a:srgbClr val="000000"/>
+                        </a:solidFill>
                         <a:latin typeface="微软雅黑" panose="020B0503020204020204" pitchFamily="34" charset="-122"/>
                         <a:ea typeface="微软雅黑" panose="020B0503020204020204" pitchFamily="34" charset="-122"/>
-                        <a:cs typeface="微软雅黑" panose="020B0503020204020204" pitchFamily="34" charset="-122"/>
+                        <a:cs typeface="微软雅黑" panose="020B0503020204020204" pitchFamily="34" charset="-120"/>
                       </a:endParaRPr>
                     </a:p>
                   </a:txBody>
@@ -5277,7 +5351,7 @@
                           <a:ea typeface="微软雅黑" panose="020B0503020204020204" pitchFamily="34" charset="-122"/>
                           <a:cs typeface="微软雅黑" panose="020B0503020204020204" pitchFamily="34" charset="-120"/>
                         </a:rPr>
-                        <a:t>Blender 建模 / 资产管线、阴影、交互与 UI</a:t>
+                        <a:t>Blender 建模 / 资产管线、阴影、 UI</a:t>
                       </a:r>
                       <a:endParaRPr lang="en-US" sz="1400" dirty="0">
                         <a:latin typeface="微软雅黑" panose="020B0503020204020204" pitchFamily="34" charset="-122"/>
@@ -5803,7 +5877,11 @@
         <p:nvSpPr>
           <p:cNvPr id="6" name="Shape 4"/>
           <p:cNvSpPr/>
-          <p:nvPr/>
+          <p:nvPr>
+            <p:custDataLst>
+              <p:tags r:id="rId1"/>
+            </p:custDataLst>
+          </p:nvPr>
         </p:nvSpPr>
         <p:spPr>
           <a:xfrm>
@@ -5837,7 +5915,11 @@
         <p:nvSpPr>
           <p:cNvPr id="7" name="Text 5"/>
           <p:cNvSpPr/>
-          <p:nvPr/>
+          <p:nvPr>
+            <p:custDataLst>
+              <p:tags r:id="rId2"/>
+            </p:custDataLst>
+          </p:nvPr>
         </p:nvSpPr>
         <p:spPr>
           <a:xfrm>
@@ -5875,7 +5957,11 @@
         <p:nvSpPr>
           <p:cNvPr id="8" name="Text 6"/>
           <p:cNvSpPr/>
-          <p:nvPr/>
+          <p:nvPr>
+            <p:custDataLst>
+              <p:tags r:id="rId3"/>
+            </p:custDataLst>
+          </p:nvPr>
         </p:nvSpPr>
         <p:spPr>
           <a:xfrm>
@@ -5913,7 +5999,11 @@
         <p:nvSpPr>
           <p:cNvPr id="9" name="Shape 7"/>
           <p:cNvSpPr/>
-          <p:nvPr/>
+          <p:nvPr>
+            <p:custDataLst>
+              <p:tags r:id="rId4"/>
+            </p:custDataLst>
+          </p:nvPr>
         </p:nvSpPr>
         <p:spPr>
           <a:xfrm>
@@ -5947,7 +6037,11 @@
         <p:nvSpPr>
           <p:cNvPr id="10" name="Text 8"/>
           <p:cNvSpPr/>
-          <p:nvPr/>
+          <p:nvPr>
+            <p:custDataLst>
+              <p:tags r:id="rId5"/>
+            </p:custDataLst>
+          </p:nvPr>
         </p:nvSpPr>
         <p:spPr>
           <a:xfrm>
@@ -5985,7 +6079,11 @@
         <p:nvSpPr>
           <p:cNvPr id="11" name="Text 9"/>
           <p:cNvSpPr/>
-          <p:nvPr/>
+          <p:nvPr>
+            <p:custDataLst>
+              <p:tags r:id="rId6"/>
+            </p:custDataLst>
+          </p:nvPr>
         </p:nvSpPr>
         <p:spPr>
           <a:xfrm>
@@ -6023,7 +6121,11 @@
         <p:nvSpPr>
           <p:cNvPr id="12" name="Shape 10"/>
           <p:cNvSpPr/>
-          <p:nvPr/>
+          <p:nvPr>
+            <p:custDataLst>
+              <p:tags r:id="rId7"/>
+            </p:custDataLst>
+          </p:nvPr>
         </p:nvSpPr>
         <p:spPr>
           <a:xfrm>
@@ -6057,7 +6159,11 @@
         <p:nvSpPr>
           <p:cNvPr id="13" name="Text 11"/>
           <p:cNvSpPr/>
-          <p:nvPr/>
+          <p:nvPr>
+            <p:custDataLst>
+              <p:tags r:id="rId8"/>
+            </p:custDataLst>
+          </p:nvPr>
         </p:nvSpPr>
         <p:spPr>
           <a:xfrm>
@@ -6095,7 +6201,11 @@
         <p:nvSpPr>
           <p:cNvPr id="14" name="Text 12"/>
           <p:cNvSpPr/>
-          <p:nvPr/>
+          <p:nvPr>
+            <p:custDataLst>
+              <p:tags r:id="rId9"/>
+            </p:custDataLst>
+          </p:nvPr>
         </p:nvSpPr>
         <p:spPr>
           <a:xfrm>
@@ -6133,7 +6243,11 @@
         <p:nvSpPr>
           <p:cNvPr id="15" name="Shape 13"/>
           <p:cNvSpPr/>
-          <p:nvPr/>
+          <p:nvPr>
+            <p:custDataLst>
+              <p:tags r:id="rId10"/>
+            </p:custDataLst>
+          </p:nvPr>
         </p:nvSpPr>
         <p:spPr>
           <a:xfrm>
@@ -6167,7 +6281,11 @@
         <p:nvSpPr>
           <p:cNvPr id="16" name="Text 14"/>
           <p:cNvSpPr/>
-          <p:nvPr/>
+          <p:nvPr>
+            <p:custDataLst>
+              <p:tags r:id="rId11"/>
+            </p:custDataLst>
+          </p:nvPr>
         </p:nvSpPr>
         <p:spPr>
           <a:xfrm>
@@ -6205,7 +6323,11 @@
         <p:nvSpPr>
           <p:cNvPr id="17" name="Text 15"/>
           <p:cNvSpPr/>
-          <p:nvPr/>
+          <p:nvPr>
+            <p:custDataLst>
+              <p:tags r:id="rId12"/>
+            </p:custDataLst>
+          </p:nvPr>
         </p:nvSpPr>
         <p:spPr>
           <a:xfrm>
@@ -6243,7 +6365,11 @@
         <p:nvSpPr>
           <p:cNvPr id="18" name="Shape 16"/>
           <p:cNvSpPr/>
-          <p:nvPr/>
+          <p:nvPr>
+            <p:custDataLst>
+              <p:tags r:id="rId13"/>
+            </p:custDataLst>
+          </p:nvPr>
         </p:nvSpPr>
         <p:spPr>
           <a:xfrm>
@@ -6277,7 +6403,11 @@
         <p:nvSpPr>
           <p:cNvPr id="19" name="Text 17"/>
           <p:cNvSpPr/>
-          <p:nvPr/>
+          <p:nvPr>
+            <p:custDataLst>
+              <p:tags r:id="rId14"/>
+            </p:custDataLst>
+          </p:nvPr>
         </p:nvSpPr>
         <p:spPr>
           <a:xfrm>
@@ -6315,7 +6445,11 @@
         <p:nvSpPr>
           <p:cNvPr id="20" name="Text 18"/>
           <p:cNvSpPr/>
-          <p:nvPr/>
+          <p:nvPr>
+            <p:custDataLst>
+              <p:tags r:id="rId15"/>
+            </p:custDataLst>
+          </p:nvPr>
         </p:nvSpPr>
         <p:spPr>
           <a:xfrm>
@@ -6353,7 +6487,11 @@
         <p:nvSpPr>
           <p:cNvPr id="21" name="Shape 19"/>
           <p:cNvSpPr/>
-          <p:nvPr/>
+          <p:nvPr>
+            <p:custDataLst>
+              <p:tags r:id="rId16"/>
+            </p:custDataLst>
+          </p:nvPr>
         </p:nvSpPr>
         <p:spPr>
           <a:xfrm>
@@ -6387,7 +6525,11 @@
         <p:nvSpPr>
           <p:cNvPr id="22" name="Text 20"/>
           <p:cNvSpPr/>
-          <p:nvPr/>
+          <p:nvPr>
+            <p:custDataLst>
+              <p:tags r:id="rId17"/>
+            </p:custDataLst>
+          </p:nvPr>
         </p:nvSpPr>
         <p:spPr>
           <a:xfrm>
@@ -6425,7 +6567,11 @@
         <p:nvSpPr>
           <p:cNvPr id="23" name="Text 21"/>
           <p:cNvSpPr/>
-          <p:nvPr/>
+          <p:nvPr>
+            <p:custDataLst>
+              <p:tags r:id="rId18"/>
+            </p:custDataLst>
+          </p:nvPr>
         </p:nvSpPr>
         <p:spPr>
           <a:xfrm>
@@ -6682,7 +6828,7 @@
                 <a:ea typeface="微软雅黑" panose="020B0503020204020204" pitchFamily="34" charset="-122"/>
                 <a:cs typeface="微软雅黑" panose="020B0503020204020204" pitchFamily="34" charset="-120"/>
               </a:rPr>
-              <a:t>白盒实现关键渲染技术：自写 GLSL 着色器，可与引擎 PBR 对照</a:t>
+              <a:t>几何全部 Blender 程序化建模，导出 GLB 实时加载</a:t>
             </a:r>
             <a:endParaRPr lang="en-US" sz="1500" dirty="0"/>
           </a:p>
@@ -6703,28 +6849,7 @@
                 <a:ea typeface="微软雅黑" panose="020B0503020204020204" pitchFamily="34" charset="-122"/>
                 <a:cs typeface="微软雅黑" panose="020B0503020204020204" pitchFamily="34" charset="-120"/>
               </a:rPr>
-              <a:t>几何全部 Blender 程序化建模，导出 GLB 实时加载</a:t>
-            </a:r>
-            <a:endParaRPr lang="en-US" sz="1500" dirty="0"/>
-          </a:p>
-          <a:p>
-            <a:pPr marL="177800" indent="-177800">
-              <a:spcAft>
-                <a:spcPts val="800"/>
-              </a:spcAft>
-              <a:buSzPct val="100000"/>
-              <a:buChar char="•"/>
-            </a:pPr>
-            <a:r>
-              <a:rPr lang="en-US" sz="1500" dirty="0">
-                <a:solidFill>
-                  <a:srgbClr val="1E293B"/>
-                </a:solidFill>
-                <a:latin typeface="微软雅黑" panose="020B0503020204020204" pitchFamily="34" charset="-122"/>
-                <a:ea typeface="微软雅黑" panose="020B0503020204020204" pitchFamily="34" charset="-122"/>
-                <a:cs typeface="微软雅黑" panose="020B0503020204020204" pitchFamily="34" charset="-120"/>
-              </a:rPr>
-              <a:t>第一人称漫游、射线拾取、实时参数面板，60–165 FPS</a:t>
+              <a:t>第一人称漫游、射线拾取、实时参数面板</a:t>
             </a:r>
             <a:endParaRPr lang="en-US" sz="1500" dirty="0"/>
           </a:p>
@@ -7976,7 +8101,29 @@
                 <a:ea typeface="微软雅黑" panose="020B0503020204020204" pitchFamily="34" charset="-122"/>
                 <a:cs typeface="微软雅黑" panose="020B0503020204020204" pitchFamily="34" charset="-120"/>
               </a:rPr>
-              <a:t>Blender (bpy 程序化建模)   →   导出 glTF / GLB (Y-up)   →   Three.js GLTFLoader 实时加载</a:t>
+              <a:t>Blender</a:t>
+            </a:r>
+            <a:r>
+              <a:rPr lang="zh-CN" altLang="en-US" sz="1500" dirty="0">
+                <a:solidFill>
+                  <a:srgbClr val="1E293B"/>
+                </a:solidFill>
+                <a:latin typeface="微软雅黑" panose="020B0503020204020204" pitchFamily="34" charset="-122"/>
+                <a:ea typeface="微软雅黑" panose="020B0503020204020204" pitchFamily="34" charset="-122"/>
+                <a:cs typeface="微软雅黑" panose="020B0503020204020204" pitchFamily="34" charset="-120"/>
+              </a:rPr>
+              <a:t>建模</a:t>
+            </a:r>
+            <a:r>
+              <a:rPr lang="en-US" sz="1500" dirty="0">
+                <a:solidFill>
+                  <a:srgbClr val="1E293B"/>
+                </a:solidFill>
+                <a:latin typeface="微软雅黑" panose="020B0503020204020204" pitchFamily="34" charset="-122"/>
+                <a:ea typeface="微软雅黑" panose="020B0503020204020204" pitchFamily="34" charset="-122"/>
+                <a:cs typeface="微软雅黑" panose="020B0503020204020204" pitchFamily="34" charset="-120"/>
+              </a:rPr>
+              <a:t> →   导出 GLB (Y-up)   →   Three.js GLTFLoader 实时加载</a:t>
             </a:r>
             <a:endParaRPr lang="en-US" sz="1500" dirty="0"/>
           </a:p>
@@ -8184,7 +8331,51 @@
                 <a:ea typeface="微软雅黑" panose="020B0503020204020204" pitchFamily="34" charset="-122"/>
                 <a:cs typeface="微软雅黑" panose="020B0503020204020204" pitchFamily="34" charset="-120"/>
               </a:rPr>
-              <a:t>全部模型用 Python (bpy) 脚本参数化生成，非外部下载</a:t>
+              <a:t>全部模型用Blender</a:t>
+            </a:r>
+            <a:r>
+              <a:rPr lang="zh-CN" altLang="en-US" sz="1500" dirty="0">
+                <a:solidFill>
+                  <a:srgbClr val="1E293B"/>
+                </a:solidFill>
+                <a:latin typeface="微软雅黑" panose="020B0503020204020204" pitchFamily="34" charset="-122"/>
+                <a:ea typeface="微软雅黑" panose="020B0503020204020204" pitchFamily="34" charset="-122"/>
+                <a:cs typeface="微软雅黑" panose="020B0503020204020204" pitchFamily="34" charset="-120"/>
+              </a:rPr>
+              <a:t>制作然后导出</a:t>
+            </a:r>
+            <a:r>
+              <a:rPr lang="en-US" altLang="zh-CN" sz="1500" dirty="0">
+                <a:solidFill>
+                  <a:srgbClr val="1E293B"/>
+                </a:solidFill>
+                <a:latin typeface="微软雅黑" panose="020B0503020204020204" pitchFamily="34" charset="-122"/>
+                <a:ea typeface="微软雅黑" panose="020B0503020204020204" pitchFamily="34" charset="-122"/>
+                <a:cs typeface="微软雅黑" panose="020B0503020204020204" pitchFamily="34" charset="-120"/>
+              </a:rPr>
+              <a:t>glb</a:t>
+            </a:r>
+            <a:r>
+              <a:rPr lang="zh-CN" altLang="en-US" sz="1500" dirty="0">
+                <a:solidFill>
+                  <a:srgbClr val="1E293B"/>
+                </a:solidFill>
+                <a:latin typeface="微软雅黑" panose="020B0503020204020204" pitchFamily="34" charset="-122"/>
+                <a:ea typeface="微软雅黑" panose="020B0503020204020204" pitchFamily="34" charset="-122"/>
+                <a:cs typeface="微软雅黑" panose="020B0503020204020204" pitchFamily="34" charset="-120"/>
+              </a:rPr>
+              <a:t>文件</a:t>
+            </a:r>
+            <a:r>
+              <a:rPr lang="en-US" sz="1500" dirty="0">
+                <a:solidFill>
+                  <a:srgbClr val="1E293B"/>
+                </a:solidFill>
+                <a:latin typeface="微软雅黑" panose="020B0503020204020204" pitchFamily="34" charset="-122"/>
+                <a:ea typeface="微软雅黑" panose="020B0503020204020204" pitchFamily="34" charset="-122"/>
+                <a:cs typeface="微软雅黑" panose="020B0503020204020204" pitchFamily="34" charset="-120"/>
+              </a:rPr>
+              <a:t>，非外部下载</a:t>
             </a:r>
             <a:endParaRPr lang="en-US" sz="1500" dirty="0"/>
           </a:p>
@@ -8227,27 +8418,6 @@
                 <a:cs typeface="微软雅黑" panose="020B0503020204020204" pitchFamily="34" charset="-120"/>
               </a:rPr>
               <a:t>桌、椅、台灯由多基本体 join 为“自定义网格模型”</a:t>
-            </a:r>
-            <a:endParaRPr lang="en-US" sz="1500" dirty="0"/>
-          </a:p>
-          <a:p>
-            <a:pPr marL="177800" indent="-177800">
-              <a:spcAft>
-                <a:spcPts val="800"/>
-              </a:spcAft>
-              <a:buSzPct val="100000"/>
-              <a:buChar char="•"/>
-            </a:pPr>
-            <a:r>
-              <a:rPr lang="en-US" sz="1500" dirty="0">
-                <a:solidFill>
-                  <a:srgbClr val="1E293B"/>
-                </a:solidFill>
-                <a:latin typeface="微软雅黑" panose="020B0503020204020204" pitchFamily="34" charset="-122"/>
-                <a:ea typeface="微软雅黑" panose="020B0503020204020204" pitchFamily="34" charset="-122"/>
-                <a:cs typeface="微软雅黑" panose="020B0503020204020204" pitchFamily="34" charset="-120"/>
-              </a:rPr>
-              <a:t>glTF 导出启用 Y-up 转换，解决 Blender(Z-up) 坐标差异</a:t>
             </a:r>
             <a:endParaRPr lang="en-US" sz="1500" dirty="0"/>
           </a:p>
@@ -8866,7 +9036,7 @@
                 <a:ea typeface="微软雅黑" panose="020B0503020204020204" pitchFamily="34" charset="-122"/>
                 <a:cs typeface="微软雅黑" panose="020B0503020204020204" pitchFamily="34" charset="-120"/>
               </a:rPr>
-              <a:t>核心技术 ①：Blinn-Phong 光照（自写 GLSL）</a:t>
+              <a:t>核心技术 ①：Blinn-Phong 光照</a:t>
             </a:r>
             <a:endParaRPr lang="en-US" sz="2800" dirty="0"/>
           </a:p>
@@ -10095,6 +10265,186 @@
     <a:masterClrMapping/>
   </p:clrMapOvr>
 </p:sld>
+</file>
+
+<file path=ppt/tags/tag1.xml><?xml version="1.0" encoding="utf-8"?>
+<p:tagLst xmlns:p="http://schemas.openxmlformats.org/presentationml/2006/main">
+  <p:tag name="KSO_WM_DIAGRAM_VIRTUALLY_FRAME" val="{&quot;height&quot;:345.6,&quot;left&quot;:57.6,&quot;top&quot;:122.4,&quot;width&quot;:849.6}"/>
+</p:tagLst>
+</file>
+
+<file path=ppt/tags/tag10.xml><?xml version="1.0" encoding="utf-8"?>
+<p:tagLst xmlns:p="http://schemas.openxmlformats.org/presentationml/2006/main">
+  <p:tag name="KSO_WM_DIAGRAM_VIRTUALLY_FRAME" val="{&quot;height&quot;:345.6,&quot;left&quot;:57.6,&quot;top&quot;:122.4,&quot;width&quot;:849.6}"/>
+</p:tagLst>
+</file>
+
+<file path=ppt/tags/tag11.xml><?xml version="1.0" encoding="utf-8"?>
+<p:tagLst xmlns:p="http://schemas.openxmlformats.org/presentationml/2006/main">
+  <p:tag name="KSO_WM_DIAGRAM_VIRTUALLY_FRAME" val="{&quot;height&quot;:345.6,&quot;left&quot;:57.6,&quot;top&quot;:122.4,&quot;width&quot;:849.6}"/>
+</p:tagLst>
+</file>
+
+<file path=ppt/tags/tag12.xml><?xml version="1.0" encoding="utf-8"?>
+<p:tagLst xmlns:p="http://schemas.openxmlformats.org/presentationml/2006/main">
+  <p:tag name="KSO_WM_DIAGRAM_VIRTUALLY_FRAME" val="{&quot;height&quot;:345.6,&quot;left&quot;:57.6,&quot;top&quot;:122.4,&quot;width&quot;:849.6}"/>
+</p:tagLst>
+</file>
+
+<file path=ppt/tags/tag13.xml><?xml version="1.0" encoding="utf-8"?>
+<p:tagLst xmlns:p="http://schemas.openxmlformats.org/presentationml/2006/main">
+  <p:tag name="KSO_WM_DIAGRAM_VIRTUALLY_FRAME" val="{&quot;height&quot;:345.6,&quot;left&quot;:57.6,&quot;top&quot;:122.4,&quot;width&quot;:849.6}"/>
+</p:tagLst>
+</file>
+
+<file path=ppt/tags/tag14.xml><?xml version="1.0" encoding="utf-8"?>
+<p:tagLst xmlns:p="http://schemas.openxmlformats.org/presentationml/2006/main">
+  <p:tag name="KSO_WM_DIAGRAM_VIRTUALLY_FRAME" val="{&quot;height&quot;:345.6,&quot;left&quot;:57.6,&quot;top&quot;:122.4,&quot;width&quot;:849.6}"/>
+</p:tagLst>
+</file>
+
+<file path=ppt/tags/tag15.xml><?xml version="1.0" encoding="utf-8"?>
+<p:tagLst xmlns:p="http://schemas.openxmlformats.org/presentationml/2006/main">
+  <p:tag name="KSO_WM_DIAGRAM_VIRTUALLY_FRAME" val="{&quot;height&quot;:345.6,&quot;left&quot;:57.6,&quot;top&quot;:122.4,&quot;width&quot;:849.6}"/>
+</p:tagLst>
+</file>
+
+<file path=ppt/tags/tag16.xml><?xml version="1.0" encoding="utf-8"?>
+<p:tagLst xmlns:p="http://schemas.openxmlformats.org/presentationml/2006/main">
+  <p:tag name="KSO_WM_DIAGRAM_VIRTUALLY_FRAME" val="{&quot;height&quot;:345.6,&quot;left&quot;:57.6,&quot;top&quot;:122.4,&quot;width&quot;:849.6}"/>
+</p:tagLst>
+</file>
+
+<file path=ppt/tags/tag17.xml><?xml version="1.0" encoding="utf-8"?>
+<p:tagLst xmlns:p="http://schemas.openxmlformats.org/presentationml/2006/main">
+  <p:tag name="KSO_WM_DIAGRAM_VIRTUALLY_FRAME" val="{&quot;height&quot;:345.6,&quot;left&quot;:57.6,&quot;top&quot;:122.4,&quot;width&quot;:849.6}"/>
+</p:tagLst>
+</file>
+
+<file path=ppt/tags/tag18.xml><?xml version="1.0" encoding="utf-8"?>
+<p:tagLst xmlns:p="http://schemas.openxmlformats.org/presentationml/2006/main">
+  <p:tag name="KSO_WM_DIAGRAM_VIRTUALLY_FRAME" val="{&quot;height&quot;:345.6,&quot;left&quot;:57.6,&quot;top&quot;:122.4,&quot;width&quot;:849.6}"/>
+</p:tagLst>
+</file>
+
+<file path=ppt/tags/tag19.xml><?xml version="1.0" encoding="utf-8"?>
+<p:tagLst xmlns:p="http://schemas.openxmlformats.org/presentationml/2006/main">
+  <p:tag name="KSO_WM_DIAGRAM_VIRTUALLY_FRAME" val="{&quot;height&quot;:295.2,&quot;left&quot;:57.6,&quot;top&quot;:129.6,&quot;width&quot;:842.4}"/>
+</p:tagLst>
+</file>
+
+<file path=ppt/tags/tag2.xml><?xml version="1.0" encoding="utf-8"?>
+<p:tagLst xmlns:p="http://schemas.openxmlformats.org/presentationml/2006/main">
+  <p:tag name="KSO_WM_DIAGRAM_VIRTUALLY_FRAME" val="{&quot;height&quot;:345.6,&quot;left&quot;:57.6,&quot;top&quot;:122.4,&quot;width&quot;:849.6}"/>
+</p:tagLst>
+</file>
+
+<file path=ppt/tags/tag20.xml><?xml version="1.0" encoding="utf-8"?>
+<p:tagLst xmlns:p="http://schemas.openxmlformats.org/presentationml/2006/main">
+  <p:tag name="KSO_WM_DIAGRAM_VIRTUALLY_FRAME" val="{&quot;height&quot;:295.2,&quot;left&quot;:57.6,&quot;top&quot;:129.6,&quot;width&quot;:842.4}"/>
+</p:tagLst>
+</file>
+
+<file path=ppt/tags/tag21.xml><?xml version="1.0" encoding="utf-8"?>
+<p:tagLst xmlns:p="http://schemas.openxmlformats.org/presentationml/2006/main">
+  <p:tag name="KSO_WM_DIAGRAM_VIRTUALLY_FRAME" val="{&quot;height&quot;:295.2,&quot;left&quot;:57.6,&quot;top&quot;:129.6,&quot;width&quot;:842.4}"/>
+</p:tagLst>
+</file>
+
+<file path=ppt/tags/tag22.xml><?xml version="1.0" encoding="utf-8"?>
+<p:tagLst xmlns:p="http://schemas.openxmlformats.org/presentationml/2006/main">
+  <p:tag name="KSO_WM_DIAGRAM_VIRTUALLY_FRAME" val="{&quot;height&quot;:295.2,&quot;left&quot;:57.6,&quot;top&quot;:129.6,&quot;width&quot;:842.4}"/>
+</p:tagLst>
+</file>
+
+<file path=ppt/tags/tag23.xml><?xml version="1.0" encoding="utf-8"?>
+<p:tagLst xmlns:p="http://schemas.openxmlformats.org/presentationml/2006/main">
+  <p:tag name="KSO_WM_DIAGRAM_VIRTUALLY_FRAME" val="{&quot;height&quot;:295.2,&quot;left&quot;:57.6,&quot;top&quot;:129.6,&quot;width&quot;:842.4}"/>
+</p:tagLst>
+</file>
+
+<file path=ppt/tags/tag24.xml><?xml version="1.0" encoding="utf-8"?>
+<p:tagLst xmlns:p="http://schemas.openxmlformats.org/presentationml/2006/main">
+  <p:tag name="KSO_WM_DIAGRAM_VIRTUALLY_FRAME" val="{&quot;height&quot;:295.2,&quot;left&quot;:57.6,&quot;top&quot;:129.6,&quot;width&quot;:842.4}"/>
+</p:tagLst>
+</file>
+
+<file path=ppt/tags/tag25.xml><?xml version="1.0" encoding="utf-8"?>
+<p:tagLst xmlns:p="http://schemas.openxmlformats.org/presentationml/2006/main">
+  <p:tag name="KSO_WM_DIAGRAM_VIRTUALLY_FRAME" val="{&quot;height&quot;:295.2,&quot;left&quot;:57.6,&quot;top&quot;:129.6,&quot;width&quot;:842.4}"/>
+</p:tagLst>
+</file>
+
+<file path=ppt/tags/tag26.xml><?xml version="1.0" encoding="utf-8"?>
+<p:tagLst xmlns:p="http://schemas.openxmlformats.org/presentationml/2006/main">
+  <p:tag name="KSO_WM_DIAGRAM_VIRTUALLY_FRAME" val="{&quot;height&quot;:295.2,&quot;left&quot;:57.6,&quot;top&quot;:129.6,&quot;width&quot;:842.4}"/>
+</p:tagLst>
+</file>
+
+<file path=ppt/tags/tag27.xml><?xml version="1.0" encoding="utf-8"?>
+<p:tagLst xmlns:p="http://schemas.openxmlformats.org/presentationml/2006/main">
+  <p:tag name="KSO_WM_DIAGRAM_VIRTUALLY_FRAME" val="{&quot;height&quot;:295.2,&quot;left&quot;:57.6,&quot;top&quot;:129.6,&quot;width&quot;:842.4}"/>
+</p:tagLst>
+</file>
+
+<file path=ppt/tags/tag28.xml><?xml version="1.0" encoding="utf-8"?>
+<p:tagLst xmlns:p="http://schemas.openxmlformats.org/presentationml/2006/main">
+  <p:tag name="KSO_WM_DIAGRAM_VIRTUALLY_FRAME" val="{&quot;height&quot;:295.2,&quot;left&quot;:57.6,&quot;top&quot;:129.6,&quot;width&quot;:842.4}"/>
+</p:tagLst>
+</file>
+
+<file path=ppt/tags/tag29.xml><?xml version="1.0" encoding="utf-8"?>
+<p:tagLst xmlns:p="http://schemas.openxmlformats.org/presentationml/2006/main">
+  <p:tag name="KSO_WM_DIAGRAM_VIRTUALLY_FRAME" val="{&quot;height&quot;:295.2,&quot;left&quot;:57.6,&quot;top&quot;:129.6,&quot;width&quot;:842.4}"/>
+</p:tagLst>
+</file>
+
+<file path=ppt/tags/tag3.xml><?xml version="1.0" encoding="utf-8"?>
+<p:tagLst xmlns:p="http://schemas.openxmlformats.org/presentationml/2006/main">
+  <p:tag name="KSO_WM_DIAGRAM_VIRTUALLY_FRAME" val="{&quot;height&quot;:345.6,&quot;left&quot;:57.6,&quot;top&quot;:122.4,&quot;width&quot;:849.6}"/>
+</p:tagLst>
+</file>
+
+<file path=ppt/tags/tag30.xml><?xml version="1.0" encoding="utf-8"?>
+<p:tagLst xmlns:p="http://schemas.openxmlformats.org/presentationml/2006/main">
+  <p:tag name="KSO_WM_DIAGRAM_VIRTUALLY_FRAME" val="{&quot;height&quot;:295.2,&quot;left&quot;:57.6,&quot;top&quot;:129.6,&quot;width&quot;:842.4}"/>
+</p:tagLst>
+</file>
+
+<file path=ppt/tags/tag4.xml><?xml version="1.0" encoding="utf-8"?>
+<p:tagLst xmlns:p="http://schemas.openxmlformats.org/presentationml/2006/main">
+  <p:tag name="KSO_WM_DIAGRAM_VIRTUALLY_FRAME" val="{&quot;height&quot;:345.6,&quot;left&quot;:57.6,&quot;top&quot;:122.4,&quot;width&quot;:849.6}"/>
+</p:tagLst>
+</file>
+
+<file path=ppt/tags/tag5.xml><?xml version="1.0" encoding="utf-8"?>
+<p:tagLst xmlns:p="http://schemas.openxmlformats.org/presentationml/2006/main">
+  <p:tag name="KSO_WM_DIAGRAM_VIRTUALLY_FRAME" val="{&quot;height&quot;:345.6,&quot;left&quot;:57.6,&quot;top&quot;:122.4,&quot;width&quot;:849.6}"/>
+</p:tagLst>
+</file>
+
+<file path=ppt/tags/tag6.xml><?xml version="1.0" encoding="utf-8"?>
+<p:tagLst xmlns:p="http://schemas.openxmlformats.org/presentationml/2006/main">
+  <p:tag name="KSO_WM_DIAGRAM_VIRTUALLY_FRAME" val="{&quot;height&quot;:345.6,&quot;left&quot;:57.6,&quot;top&quot;:122.4,&quot;width&quot;:849.6}"/>
+</p:tagLst>
+</file>
+
+<file path=ppt/tags/tag7.xml><?xml version="1.0" encoding="utf-8"?>
+<p:tagLst xmlns:p="http://schemas.openxmlformats.org/presentationml/2006/main">
+  <p:tag name="KSO_WM_DIAGRAM_VIRTUALLY_FRAME" val="{&quot;height&quot;:345.6,&quot;left&quot;:57.6,&quot;top&quot;:122.4,&quot;width&quot;:849.6}"/>
+</p:tagLst>
+</file>
+
+<file path=ppt/tags/tag8.xml><?xml version="1.0" encoding="utf-8"?>
+<p:tagLst xmlns:p="http://schemas.openxmlformats.org/presentationml/2006/main">
+  <p:tag name="KSO_WM_DIAGRAM_VIRTUALLY_FRAME" val="{&quot;height&quot;:345.6,&quot;left&quot;:57.6,&quot;top&quot;:122.4,&quot;width&quot;:849.6}"/>
+</p:tagLst>
+</file>
+
+<file path=ppt/tags/tag9.xml><?xml version="1.0" encoding="utf-8"?>
+<p:tagLst xmlns:p="http://schemas.openxmlformats.org/presentationml/2006/main">
+  <p:tag name="KSO_WM_DIAGRAM_VIRTUALLY_FRAME" val="{&quot;height&quot;:345.6,&quot;left&quot;:57.6,&quot;top&quot;:122.4,&quot;width&quot;:849.6}"/>
+</p:tagLst>
 </file>
 
 <file path=ppt/theme/theme1.xml><?xml version="1.0" encoding="utf-8"?>
